--- a/output/URBANER_BMC_SWOT.pptx
+++ b/output/URBANER_BMC_SWOT.pptx
@@ -3761,7 +3761,7 @@
                 </a:solidFill>
                 <a:latin typeface="Microsoft YaHei"/>
               </a:rPr>
-              <a:t>S2  Beard Hero SKU B0FL267TCG 已成形</a:t>
+              <a:t>S2  Beard 自家旗艦 Hero SKU B0GL2DKVQH 已成形</a:t>
             </a:r>
           </a:p>
           <a:p>
@@ -3773,7 +3773,7 @@
                 </a:solidFill>
                 <a:latin typeface="Microsoft YaHei"/>
               </a:rPr>
-              <a:t>    距理想點 1.601；3,337 則 Beard 評論底量</a:t>
+              <a:t>    距理想 2.49 (市場頂尖 Ufree 1.60、仍需追趕)；4,360 則 US 自有評論</a:t>
             </a:r>
           </a:p>
           <a:p>
@@ -4984,7 +4984,7 @@
                 </a:solidFill>
                 <a:latin typeface="Microsoft YaHei"/>
               </a:rPr>
-              <a:t>[S2×O4] B0FL267TCG 升級成 7-in-1 套組版主推 Q4</a:t>
+              <a:t>[S2×O4] B0GL2DKVQH 升級成 7-in-1 套組版主推 Q4</a:t>
             </a:r>
           </a:p>
           <a:p>
@@ -6350,7 +6350,7 @@
                 </a:solidFill>
                 <a:latin typeface="Microsoft YaHei"/>
               </a:rPr>
-              <a:t>• 主推 B0FL267TCG (Beard Hero) 改為 7-in-1 套組 + 禮盒包裝</a:t>
+              <a:t>• 主推 B0GL2DKVQH (Beard 自家旗艦) 改為 7-in-1 套組 + 禮盒包裝</a:t>
             </a:r>
           </a:p>
           <a:p>
@@ -7417,7 +7417,7 @@
                 </a:solidFill>
                 <a:latin typeface="Microsoft YaHei"/>
               </a:rPr>
-              <a:t>• Hero SKU B0GBWZBMS5 (Nose/Ear)</a:t>
+              <a:t>• Hero SKU B07CYZH2XC (Beard/Mustache)</a:t>
             </a:r>
           </a:p>
           <a:p>
@@ -8755,7 +8755,19 @@
                 </a:solidFill>
                 <a:latin typeface="Microsoft YaHei"/>
               </a:rPr>
-              <a:t>• 主：Nose/Ear Trimmer 系列 (Hero B0GBWZBMS5)</a:t>
+              <a:t>• 主：Beard/Mustache Trimmer 系列 (自家旗艦 Hero B07CYZH2XC)</a:t>
+            </a:r>
+          </a:p>
+          <a:p>
+            <a:pPr algn="l"/>
+            <a:r>
+              <a:rPr sz="800" b="0">
+                <a:solidFill>
+                  <a:srgbClr val="4A4A4A"/>
+                </a:solidFill>
+                <a:latin typeface="Microsoft YaHei"/>
+              </a:rPr>
+              <a:t>  Nose/Ear 為市場頂尖所在、屬待新開類別</a:t>
             </a:r>
           </a:p>
           <a:p>
@@ -9213,7 +9225,7 @@
                 </a:solidFill>
                 <a:latin typeface="Microsoft YaHei"/>
               </a:rPr>
-              <a:t>S3  Hero SKU B0GBWZBMS5 已成形</a:t>
+              <a:t>S3  Beard 自家旗艦 Hero SKU B07CYZH2XC 已成形</a:t>
             </a:r>
           </a:p>
           <a:p>
@@ -9225,7 +9237,7 @@
                 </a:solidFill>
                 <a:latin typeface="Microsoft YaHei"/>
               </a:rPr>
-              <a:t>    距理想點 1.97；7,163 則 JP 評論底量</a:t>
+              <a:t>    距理想 3.43 (市場頂尖 1.97、JP 落後較大)；7,163 則 JP 自有評論</a:t>
             </a:r>
           </a:p>
           <a:p>
@@ -9791,7 +9803,7 @@
                 </a:solidFill>
                 <a:latin typeface="Microsoft YaHei"/>
               </a:rPr>
-              <a:t>    URBANER B0GBWZBMS5 中價精品切入</a:t>
+              <a:t>    URBANER 需新開 Nose/Ear 旗艦、以中價精品切入</a:t>
             </a:r>
           </a:p>
         </p:txBody>
@@ -10460,7 +10472,7 @@
                 </a:solidFill>
                 <a:latin typeface="Microsoft YaHei"/>
               </a:rPr>
-              <a:t>[S3×O3] B0GBWZBMS5 加 dB 數値化 (50dB 以下)</a:t>
+              <a:t>[S3×O3] B07CYZH2XC 加 dB 數値化 (50dB 以下)</a:t>
             </a:r>
           </a:p>
           <a:p>
@@ -11910,7 +11922,7 @@
                 </a:solidFill>
                 <a:latin typeface="Microsoft YaHei"/>
               </a:rPr>
-              <a:t>  Hero SKU B0GBWZBMS5 (鼻毛/耳毛) → 補 W2</a:t>
+              <a:t>  自家旗艦 Hero SKU B07CYZH2XC (Beard) → 補 W2</a:t>
             </a:r>
           </a:p>
           <a:p>
@@ -13224,7 +13236,7 @@
                 </a:solidFill>
                 <a:latin typeface="Microsoft YaHei"/>
               </a:rPr>
-              <a:t>Beard+Nose</a:t>
+              <a:t>美日 Beard</a:t>
             </a:r>
           </a:p>
           <a:p>
@@ -13236,7 +13248,7 @@
                 </a:solidFill>
                 <a:latin typeface="Microsoft YaHei"/>
               </a:rPr>
-              <a:t>雙旗艦</a:t>
+              <a:t>自家旗艦</a:t>
             </a:r>
           </a:p>
           <a:p>
@@ -14388,7 +14400,7 @@
                 </a:solidFill>
                 <a:latin typeface="Microsoft YaHei"/>
               </a:rPr>
-              <a:t>②  Hero SKU 先做深、再做廣  — US: B0FL267TCG / JP: B0GBWZBMS5；不要分散資源</a:t>
+              <a:t>②  Hero SKU 先做深、再做廣  — US: B0GL2DKVQH / JP: B07CYZH2XC；不要分散資源</a:t>
             </a:r>
           </a:p>
           <a:p>
@@ -14868,7 +14880,7 @@
                 </a:solidFill>
                 <a:latin typeface="Microsoft YaHei"/>
               </a:rPr>
-              <a:t>【US】Hero SKU B0FL267TCG Listing A+ 加入</a:t>
+              <a:t>【US】Hero SKU B0GL2DKVQH Listing A+ 加入</a:t>
             </a:r>
           </a:p>
           <a:p>
@@ -15562,7 +15574,7 @@
                 </a:solidFill>
                 <a:latin typeface="Microsoft YaHei"/>
               </a:rPr>
-              <a:t>【整體】Beard/Nose 年營收 &gt; USD 5M 後</a:t>
+              <a:t>【整體】美日 Beard 自家旗艦年營收 &gt; USD 5M 後</a:t>
             </a:r>
           </a:p>
           <a:p>
@@ -19694,7 +19706,7 @@
                 </a:solidFill>
                 <a:latin typeface="Microsoft YaHei"/>
               </a:rPr>
-              <a:t>• Beard / Nose-Ear 雙旗艦明確</a:t>
+              <a:t>• 美日自家旗艦皆 Beard/Mustache 精品</a:t>
             </a:r>
           </a:p>
           <a:p>
@@ -19706,7 +19718,7 @@
                 </a:solidFill>
                 <a:latin typeface="Microsoft YaHei"/>
               </a:rPr>
-              <a:t>• 雙市場差異化主打 SKU</a:t>
+              <a:t>• 雙市場差異化主打自家 SKU</a:t>
             </a:r>
           </a:p>
           <a:p>
@@ -19718,7 +19730,7 @@
                 </a:solidFill>
                 <a:latin typeface="Microsoft YaHei"/>
               </a:rPr>
-              <a:t>  US: B0FL267TCG (Beard)</a:t>
+              <a:t>  US: B0GL2DKVQH (Beard)</a:t>
             </a:r>
           </a:p>
           <a:p>
@@ -19730,7 +19742,7 @@
                 </a:solidFill>
                 <a:latin typeface="Microsoft YaHei"/>
               </a:rPr>
-              <a:t>  JP: B0GBWZBMS5 (Nose/Ear)</a:t>
+              <a:t>  JP: B07CYZH2XC (Beard)</a:t>
             </a:r>
           </a:p>
         </p:txBody>
@@ -21303,7 +21315,7 @@
                 </a:solidFill>
                 <a:latin typeface="Microsoft YaHei"/>
               </a:rPr>
-              <a:t>S4  Beard + Nose/Ear 雙旗艦 Hero SKU 已成形</a:t>
+              <a:t>S4  美日 Beard/Mustache 自家旗艦 Hero SKU 已成形</a:t>
             </a:r>
           </a:p>
           <a:p>
@@ -22550,7 +22562,7 @@
                 </a:solidFill>
                 <a:latin typeface="Microsoft YaHei"/>
               </a:rPr>
-              <a:t>[S4×O2] 集中 Hero SKU B0FL267TCG，做 Father's Day 禮盒版</a:t>
+              <a:t>[S4×O2] 集中 Hero SKU B0GL2DKVQH，做 Father's Day 禮盒版</a:t>
             </a:r>
           </a:p>
           <a:p>
@@ -24120,7 +24132,7 @@
                 </a:solidFill>
                 <a:latin typeface="Microsoft YaHei"/>
               </a:rPr>
-              <a:t>    ：Beard/Nose 雙旗艦每年營收 &gt; USD 5M 後再啟動</a:t>
+              <a:t>    ：美日 Beard 自家旗艦年營收 &gt; USD 5M 後再啟動</a:t>
             </a:r>
           </a:p>
           <a:p>
@@ -24995,7 +25007,7 @@
                 </a:solidFill>
                 <a:latin typeface="Microsoft YaHei"/>
               </a:rPr>
-              <a:t>• Hero SKU B0FL267TCG (Beard)</a:t>
+              <a:t>• Hero SKU B0GL2DKVQH (Beard)</a:t>
             </a:r>
           </a:p>
           <a:p>
@@ -26309,7 +26321,7 @@
                 </a:solidFill>
                 <a:latin typeface="Microsoft YaHei"/>
               </a:rPr>
-              <a:t>• 主：Beard / Mustache Trimmer 系列銷售 (Hero B0FL267TCG)</a:t>
+              <a:t>• 主：Beard / Mustache Trimmer 系列銷售 (Hero B0GL2DKVQH)</a:t>
             </a:r>
           </a:p>
           <a:p>
